--- a/assets/powerpoints/module-n2-secretaire/C1-demain-je-ne-viens-pas.pptx
+++ b/assets/powerpoints/module-n2-secretaire/C1-demain-je-ne-viens-pas.pptx
@@ -10016,7 +10016,97 @@
                 </a:solidFill>
                 <a:latin typeface="Verdana"/>
               </a:rPr>
-              <a:t>Deux petits mots, et le verbe au milieu. Devant une voyelle, &lt;b&gt;ne&lt;/b&gt; devient &lt;b&gt;n'&lt;/b&gt; : je &lt;b&gt;n'&lt;/b&gt;ai pas, ce &lt;b&gt;n'&lt;/b&gt;est pas. À l'oral, beaucoup de gens disent « je viens pas » ; à l'écrit, on garde le &lt;b&gt;ne&lt;/b&gt;.</a:t>
+              <a:t>Deux petits mots, et le verbe au milieu. Devant une voyelle, </a:t>
+            </a:r>
+            <a:r>
+              <a:rPr sz="2000" b="1" i="0">
+                <a:solidFill>
+                  <a:srgbClr val="4B4F52"/>
+                </a:solidFill>
+                <a:latin typeface="Verdana"/>
+              </a:rPr>
+              <a:t>ne</a:t>
+            </a:r>
+            <a:r>
+              <a:rPr sz="2000" b="0" i="0">
+                <a:solidFill>
+                  <a:srgbClr val="4B4F52"/>
+                </a:solidFill>
+                <a:latin typeface="Verdana"/>
+              </a:rPr>
+              <a:t> devient </a:t>
+            </a:r>
+            <a:r>
+              <a:rPr sz="2000" b="1" i="0">
+                <a:solidFill>
+                  <a:srgbClr val="4B4F52"/>
+                </a:solidFill>
+                <a:latin typeface="Verdana"/>
+              </a:rPr>
+              <a:t>n'</a:t>
+            </a:r>
+            <a:r>
+              <a:rPr sz="2000" b="0" i="0">
+                <a:solidFill>
+                  <a:srgbClr val="4B4F52"/>
+                </a:solidFill>
+                <a:latin typeface="Verdana"/>
+              </a:rPr>
+              <a:t> : je </a:t>
+            </a:r>
+            <a:r>
+              <a:rPr sz="2000" b="1" i="0">
+                <a:solidFill>
+                  <a:srgbClr val="4B4F52"/>
+                </a:solidFill>
+                <a:latin typeface="Verdana"/>
+              </a:rPr>
+              <a:t>n'</a:t>
+            </a:r>
+            <a:r>
+              <a:rPr sz="2000" b="0" i="0">
+                <a:solidFill>
+                  <a:srgbClr val="4B4F52"/>
+                </a:solidFill>
+                <a:latin typeface="Verdana"/>
+              </a:rPr>
+              <a:t>ai pas, ce </a:t>
+            </a:r>
+            <a:r>
+              <a:rPr sz="2000" b="1" i="0">
+                <a:solidFill>
+                  <a:srgbClr val="4B4F52"/>
+                </a:solidFill>
+                <a:latin typeface="Verdana"/>
+              </a:rPr>
+              <a:t>n'</a:t>
+            </a:r>
+            <a:r>
+              <a:rPr sz="2000" b="0" i="0">
+                <a:solidFill>
+                  <a:srgbClr val="4B4F52"/>
+                </a:solidFill>
+                <a:latin typeface="Verdana"/>
+              </a:rPr>
+              <a:t>est pas. À l'oral, beaucoup de gens disent « je viens pas » ; à l'écrit, on garde le </a:t>
+            </a:r>
+            <a:r>
+              <a:rPr sz="2000" b="1" i="0">
+                <a:solidFill>
+                  <a:srgbClr val="4B4F52"/>
+                </a:solidFill>
+                <a:latin typeface="Verdana"/>
+              </a:rPr>
+              <a:t>ne</a:t>
+            </a:r>
+            <a:r>
+              <a:rPr sz="2000" b="0" i="0">
+                <a:solidFill>
+                  <a:srgbClr val="4B4F52"/>
+                </a:solidFill>
+                <a:latin typeface="Verdana"/>
+              </a:rPr>
+              <a:t>.</a:t>
             </a:r>
           </a:p>
         </p:txBody>
@@ -12411,7 +12501,25 @@
                 </a:solidFill>
                 <a:latin typeface="Verdana"/>
               </a:rPr>
-              <a:t>Tout le monde dit « je viens pas ». Mais dans un message au secrétariat, on écrit &lt;b&gt;je ne viens pas&lt;/b&gt; : c'est ce qu'on attend d'un papier. L'oral et l'écrit ne suivent pas la même règle, et les deux sont justes à leur place.</a:t>
+              <a:t>Tout le monde dit « je viens pas ». Mais dans un message au secrétariat, on écrit </a:t>
+            </a:r>
+            <a:r>
+              <a:rPr sz="2000" b="1" i="0">
+                <a:solidFill>
+                  <a:srgbClr val="4B4F52"/>
+                </a:solidFill>
+                <a:latin typeface="Verdana"/>
+              </a:rPr>
+              <a:t>je ne viens pas</a:t>
+            </a:r>
+            <a:r>
+              <a:rPr sz="2000" b="0" i="0">
+                <a:solidFill>
+                  <a:srgbClr val="4B4F52"/>
+                </a:solidFill>
+                <a:latin typeface="Verdana"/>
+              </a:rPr>
+              <a:t> : c'est ce qu'on attend d'un papier. L'oral et l'écrit ne suivent pas la même règle, et les deux sont justes à leur place.</a:t>
             </a:r>
           </a:p>
         </p:txBody>
